--- a/展示会2026/2026年展示会用井上恋.pptx
+++ b/展示会2026/2026年展示会用井上恋.pptx
@@ -107,6 +107,11 @@
       </a:defRPr>
     </a:lvl9pPr>
   </p:defaultTextStyle>
+  <p:extLst>
+    <p:ext uri="{EFAFB233-063F-42B5-8137-9DF3F51BA10A}">
+      <p15:sldGuideLst xmlns:p15="http://schemas.microsoft.com/office/powerpoint/2012/main"/>
+    </p:ext>
+  </p:extLst>
 </p:presentation>
 </file>
 
@@ -342,7 +347,7 @@
           <a:p>
             <a:fld id="{758F923D-5D06-4364-8DAB-C0F9132149B8}" type="datetimeFigureOut">
               <a:rPr kumimoji="1" lang="ja-JP" altLang="en-US" smtClean="0"/>
-              <a:t>2026/1/26</a:t>
+              <a:t>2026/1/29</a:t>
             </a:fld>
             <a:endParaRPr kumimoji="1" lang="ja-JP" altLang="en-US"/>
           </a:p>
@@ -861,7 +866,7 @@
           <a:p>
             <a:fld id="{FCE2A35D-6E50-428D-AB3E-CCB13097CFBD}" type="datetimeFigureOut">
               <a:rPr kumimoji="1" lang="ja-JP" altLang="en-US" smtClean="0"/>
-              <a:t>2026/1/26</a:t>
+              <a:t>2026/1/29</a:t>
             </a:fld>
             <a:endParaRPr kumimoji="1" lang="ja-JP" altLang="en-US"/>
           </a:p>
@@ -1061,7 +1066,7 @@
           <a:p>
             <a:fld id="{FCE2A35D-6E50-428D-AB3E-CCB13097CFBD}" type="datetimeFigureOut">
               <a:rPr kumimoji="1" lang="ja-JP" altLang="en-US" smtClean="0"/>
-              <a:t>2026/1/26</a:t>
+              <a:t>2026/1/29</a:t>
             </a:fld>
             <a:endParaRPr kumimoji="1" lang="ja-JP" altLang="en-US"/>
           </a:p>
@@ -1271,7 +1276,7 @@
           <a:p>
             <a:fld id="{FCE2A35D-6E50-428D-AB3E-CCB13097CFBD}" type="datetimeFigureOut">
               <a:rPr kumimoji="1" lang="ja-JP" altLang="en-US" smtClean="0"/>
-              <a:t>2026/1/26</a:t>
+              <a:t>2026/1/29</a:t>
             </a:fld>
             <a:endParaRPr kumimoji="1" lang="ja-JP" altLang="en-US"/>
           </a:p>
@@ -1471,7 +1476,7 @@
           <a:p>
             <a:fld id="{FCE2A35D-6E50-428D-AB3E-CCB13097CFBD}" type="datetimeFigureOut">
               <a:rPr kumimoji="1" lang="ja-JP" altLang="en-US" smtClean="0"/>
-              <a:t>2026/1/26</a:t>
+              <a:t>2026/1/29</a:t>
             </a:fld>
             <a:endParaRPr kumimoji="1" lang="ja-JP" altLang="en-US"/>
           </a:p>
@@ -1716,7 +1721,7 @@
           <a:p>
             <a:fld id="{FCE2A35D-6E50-428D-AB3E-CCB13097CFBD}" type="datetimeFigureOut">
               <a:rPr kumimoji="1" lang="ja-JP" altLang="en-US" smtClean="0"/>
-              <a:t>2026/1/26</a:t>
+              <a:t>2026/1/29</a:t>
             </a:fld>
             <a:endParaRPr kumimoji="1" lang="ja-JP" altLang="en-US"/>
           </a:p>
@@ -2009,7 +2014,7 @@
           <a:p>
             <a:fld id="{FCE2A35D-6E50-428D-AB3E-CCB13097CFBD}" type="datetimeFigureOut">
               <a:rPr kumimoji="1" lang="ja-JP" altLang="en-US" smtClean="0"/>
-              <a:t>2026/1/26</a:t>
+              <a:t>2026/1/29</a:t>
             </a:fld>
             <a:endParaRPr kumimoji="1" lang="ja-JP" altLang="en-US"/>
           </a:p>
@@ -2437,7 +2442,7 @@
           <a:p>
             <a:fld id="{FCE2A35D-6E50-428D-AB3E-CCB13097CFBD}" type="datetimeFigureOut">
               <a:rPr kumimoji="1" lang="ja-JP" altLang="en-US" smtClean="0"/>
-              <a:t>2026/1/26</a:t>
+              <a:t>2026/1/29</a:t>
             </a:fld>
             <a:endParaRPr kumimoji="1" lang="ja-JP" altLang="en-US"/>
           </a:p>
@@ -2554,7 +2559,7 @@
           <a:p>
             <a:fld id="{FCE2A35D-6E50-428D-AB3E-CCB13097CFBD}" type="datetimeFigureOut">
               <a:rPr kumimoji="1" lang="ja-JP" altLang="en-US" smtClean="0"/>
-              <a:t>2026/1/26</a:t>
+              <a:t>2026/1/29</a:t>
             </a:fld>
             <a:endParaRPr kumimoji="1" lang="ja-JP" altLang="en-US"/>
           </a:p>
@@ -2649,7 +2654,7 @@
           <a:p>
             <a:fld id="{FCE2A35D-6E50-428D-AB3E-CCB13097CFBD}" type="datetimeFigureOut">
               <a:rPr kumimoji="1" lang="ja-JP" altLang="en-US" smtClean="0"/>
-              <a:t>2026/1/26</a:t>
+              <a:t>2026/1/29</a:t>
             </a:fld>
             <a:endParaRPr kumimoji="1" lang="ja-JP" altLang="en-US"/>
           </a:p>
@@ -2956,7 +2961,7 @@
           <a:p>
             <a:fld id="{FCE2A35D-6E50-428D-AB3E-CCB13097CFBD}" type="datetimeFigureOut">
               <a:rPr kumimoji="1" lang="ja-JP" altLang="en-US" smtClean="0"/>
-              <a:t>2026/1/26</a:t>
+              <a:t>2026/1/29</a:t>
             </a:fld>
             <a:endParaRPr kumimoji="1" lang="ja-JP" altLang="en-US"/>
           </a:p>
@@ -3208,7 +3213,7 @@
           <a:p>
             <a:fld id="{FCE2A35D-6E50-428D-AB3E-CCB13097CFBD}" type="datetimeFigureOut">
               <a:rPr kumimoji="1" lang="ja-JP" altLang="en-US" smtClean="0"/>
-              <a:t>2026/1/26</a:t>
+              <a:t>2026/1/29</a:t>
             </a:fld>
             <a:endParaRPr kumimoji="1" lang="ja-JP" altLang="en-US"/>
           </a:p>
@@ -3451,7 +3456,7 @@
           <a:p>
             <a:fld id="{FCE2A35D-6E50-428D-AB3E-CCB13097CFBD}" type="datetimeFigureOut">
               <a:rPr kumimoji="1" lang="ja-JP" altLang="en-US" smtClean="0"/>
-              <a:t>2026/1/26</a:t>
+              <a:t>2026/1/29</a:t>
             </a:fld>
             <a:endParaRPr kumimoji="1" lang="ja-JP" altLang="en-US"/>
           </a:p>
@@ -3955,7 +3960,7 @@
         </p:nvSpPr>
         <p:spPr>
           <a:xfrm>
-            <a:off x="2403904" y="3429000"/>
+            <a:off x="3131110" y="3401795"/>
             <a:ext cx="8474736" cy="769441"/>
           </a:xfrm>
           <a:prstGeom prst="rect">
@@ -4059,7 +4064,7 @@
         </p:nvSpPr>
         <p:spPr>
           <a:xfrm>
-            <a:off x="1890097" y="4183912"/>
+            <a:off x="2617303" y="4156707"/>
             <a:ext cx="9927222" cy="2215991"/>
           </a:xfrm>
           <a:prstGeom prst="rect">
@@ -4664,26 +4669,6 @@
 </file>
 
 <file path=customXml/item1.xml><?xml version="1.0" encoding="utf-8"?>
-<?mso-contentType ?>
-<FormTemplates xmlns="http://schemas.microsoft.com/sharepoint/v3/contenttype/forms">
-  <Display>DocumentLibraryForm</Display>
-  <Edit>DocumentLibraryForm</Edit>
-  <New>DocumentLibraryForm</New>
-</FormTemplates>
-</file>
-
-<file path=customXml/item2.xml><?xml version="1.0" encoding="utf-8"?>
-<p:properties xmlns:p="http://schemas.microsoft.com/office/2006/metadata/properties" xmlns:xsi="http://www.w3.org/2001/XMLSchema-instance" xmlns:pc="http://schemas.microsoft.com/office/infopath/2007/PartnerControls">
-  <documentManagement>
-    <TaxCatchAll xmlns="04574505-c322-4981-8ebb-5d25af8d4de8" xsi:nil="true"/>
-    <lcf76f155ced4ddcb4097134ff3c332f xmlns="098a3c11-7ac2-46ba-89ce-8b2d5c9f76f8">
-      <Terms xmlns="http://schemas.microsoft.com/office/infopath/2007/PartnerControls"/>
-    </lcf76f155ced4ddcb4097134ff3c332f>
-  </documentManagement>
-</p:properties>
-</file>
-
-<file path=customXml/item3.xml><?xml version="1.0" encoding="utf-8"?>
 <ct:contentTypeSchema xmlns:ct="http://schemas.microsoft.com/office/2006/metadata/contentType" xmlns:ma="http://schemas.microsoft.com/office/2006/metadata/properties/metaAttributes" ct:_="" ma:_="" ma:contentTypeName="ドキュメント" ma:contentTypeID="0x0101009C7952A5A25B2543AB99BC9B879A46ED" ma:contentTypeVersion="13" ma:contentTypeDescription="新しいドキュメントを作成します。" ma:contentTypeScope="" ma:versionID="fcd2d16037773d4f0820201a377ec3b5">
   <xsd:schema xmlns:xsd="http://www.w3.org/2001/XMLSchema" xmlns:xs="http://www.w3.org/2001/XMLSchema" xmlns:p="http://schemas.microsoft.com/office/2006/metadata/properties" xmlns:ns2="098a3c11-7ac2-46ba-89ce-8b2d5c9f76f8" xmlns:ns3="04574505-c322-4981-8ebb-5d25af8d4de8" targetNamespace="http://schemas.microsoft.com/office/2006/metadata/properties" ma:root="true" ma:fieldsID="e3b96b92a3276d52e4aef8683acc6f58" ns2:_="" ns3:_="">
     <xsd:import namespace="098a3c11-7ac2-46ba-89ce-8b2d5c9f76f8"/>
@@ -4890,10 +4875,41 @@
 </ct:contentTypeSchema>
 </file>
 
+<file path=customXml/item2.xml><?xml version="1.0" encoding="utf-8"?>
+<p:properties xmlns:p="http://schemas.microsoft.com/office/2006/metadata/properties" xmlns:xsi="http://www.w3.org/2001/XMLSchema-instance" xmlns:pc="http://schemas.microsoft.com/office/infopath/2007/PartnerControls">
+  <documentManagement>
+    <TaxCatchAll xmlns="04574505-c322-4981-8ebb-5d25af8d4de8" xsi:nil="true"/>
+    <lcf76f155ced4ddcb4097134ff3c332f xmlns="098a3c11-7ac2-46ba-89ce-8b2d5c9f76f8">
+      <Terms xmlns="http://schemas.microsoft.com/office/infopath/2007/PartnerControls"/>
+    </lcf76f155ced4ddcb4097134ff3c332f>
+  </documentManagement>
+</p:properties>
+</file>
+
+<file path=customXml/item3.xml><?xml version="1.0" encoding="utf-8"?>
+<?mso-contentType ?>
+<FormTemplates xmlns="http://schemas.microsoft.com/sharepoint/v3/contenttype/forms">
+  <Display>DocumentLibraryForm</Display>
+  <Edit>DocumentLibraryForm</Edit>
+  <New>DocumentLibraryForm</New>
+</FormTemplates>
+</file>
+
 <file path=customXml/itemProps1.xml><?xml version="1.0" encoding="utf-8"?>
-<ds:datastoreItem xmlns:ds="http://schemas.openxmlformats.org/officeDocument/2006/customXml" ds:itemID="{1A980775-8E62-4B38-B8CC-76E0047B87D1}">
+<ds:datastoreItem xmlns:ds="http://schemas.openxmlformats.org/officeDocument/2006/customXml" ds:itemID="{8E00508A-8798-408F-8B83-2C14AE817DA0}">
   <ds:schemaRefs>
-    <ds:schemaRef ds:uri="http://schemas.microsoft.com/sharepoint/v3/contenttype/forms"/>
+    <ds:schemaRef ds:uri="04574505-c322-4981-8ebb-5d25af8d4de8"/>
+    <ds:schemaRef ds:uri="098a3c11-7ac2-46ba-89ce-8b2d5c9f76f8"/>
+    <ds:schemaRef ds:uri="http://purl.org/dc/elements/1.1/"/>
+    <ds:schemaRef ds:uri="http://purl.org/dc/terms/"/>
+    <ds:schemaRef ds:uri="http://schemas.microsoft.com/internal/obd"/>
+    <ds:schemaRef ds:uri="http://schemas.microsoft.com/office/2006/documentManagement/types"/>
+    <ds:schemaRef ds:uri="http://schemas.microsoft.com/office/2006/metadata/contentType"/>
+    <ds:schemaRef ds:uri="http://schemas.microsoft.com/office/2006/metadata/properties"/>
+    <ds:schemaRef ds:uri="http://schemas.microsoft.com/office/2006/metadata/properties/metaAttributes"/>
+    <ds:schemaRef ds:uri="http://schemas.microsoft.com/office/infopath/2007/PartnerControls"/>
+    <ds:schemaRef ds:uri="http://schemas.openxmlformats.org/package/2006/metadata/core-properties"/>
+    <ds:schemaRef ds:uri="http://www.w3.org/2001/XMLSchema"/>
   </ds:schemaRefs>
 </ds:datastoreItem>
 </file>
@@ -4918,20 +4934,9 @@
 </file>
 
 <file path=customXml/itemProps3.xml><?xml version="1.0" encoding="utf-8"?>
-<ds:datastoreItem xmlns:ds="http://schemas.openxmlformats.org/officeDocument/2006/customXml" ds:itemID="{8E00508A-8798-408F-8B83-2C14AE817DA0}">
+<ds:datastoreItem xmlns:ds="http://schemas.openxmlformats.org/officeDocument/2006/customXml" ds:itemID="{1A980775-8E62-4B38-B8CC-76E0047B87D1}">
   <ds:schemaRefs>
-    <ds:schemaRef ds:uri="04574505-c322-4981-8ebb-5d25af8d4de8"/>
-    <ds:schemaRef ds:uri="098a3c11-7ac2-46ba-89ce-8b2d5c9f76f8"/>
-    <ds:schemaRef ds:uri="http://purl.org/dc/elements/1.1/"/>
-    <ds:schemaRef ds:uri="http://purl.org/dc/terms/"/>
-    <ds:schemaRef ds:uri="http://schemas.microsoft.com/internal/obd"/>
-    <ds:schemaRef ds:uri="http://schemas.microsoft.com/office/2006/documentManagement/types"/>
-    <ds:schemaRef ds:uri="http://schemas.microsoft.com/office/2006/metadata/contentType"/>
-    <ds:schemaRef ds:uri="http://schemas.microsoft.com/office/2006/metadata/properties"/>
-    <ds:schemaRef ds:uri="http://schemas.microsoft.com/office/2006/metadata/properties/metaAttributes"/>
-    <ds:schemaRef ds:uri="http://schemas.microsoft.com/office/infopath/2007/PartnerControls"/>
-    <ds:schemaRef ds:uri="http://schemas.openxmlformats.org/package/2006/metadata/core-properties"/>
-    <ds:schemaRef ds:uri="http://www.w3.org/2001/XMLSchema"/>
+    <ds:schemaRef ds:uri="http://schemas.microsoft.com/sharepoint/v3/contenttype/forms"/>
   </ds:schemaRefs>
 </ds:datastoreItem>
 </file>